--- a/курсач и диплом/Файлы/Прокопьев Даниил 932204 курсовая.pptx
+++ b/курсач и диплом/Файлы/Прокопьев Даниил 932204 курсовая.pptx
@@ -8,7 +8,7 @@
     <p:notesMasterId r:id="rId4"/>
   </p:notesMasterIdLst>
   <p:handoutMasterIdLst>
-    <p:handoutMasterId r:id="rId17"/>
+    <p:handoutMasterId r:id="rId14"/>
   </p:handoutMasterIdLst>
   <p:sldIdLst>
     <p:sldId id="259" r:id="rId3"/>
@@ -21,9 +21,6 @@
     <p:sldId id="294" r:id="rId11"/>
     <p:sldId id="295" r:id="rId12"/>
     <p:sldId id="267" r:id="rId13"/>
-    <p:sldId id="286" r:id="rId14"/>
-    <p:sldId id="287" r:id="rId15"/>
-    <p:sldId id="288" r:id="rId16"/>
   </p:sldIdLst>
   <p:sldSz cx="12192000" cy="6858000"/>
   <p:notesSz cx="7103745" cy="10234295"/>
@@ -4137,260 +4134,6 @@
       </p:par>
     </p:tnLst>
   </p:timing>
-</p:sld>
-</file>
-
-<file path=ppt/slides/slide11.xml><?xml version="1.0" encoding="utf-8"?>
-<p:sld xmlns:a="http://schemas.openxmlformats.org/drawingml/2006/main" xmlns:r="http://schemas.openxmlformats.org/officeDocument/2006/relationships" xmlns:p="http://schemas.openxmlformats.org/presentationml/2006/main">
-  <p:cSld>
-    <p:spTree>
-      <p:nvGrpSpPr>
-        <p:cNvPr id="1" name=""/>
-        <p:cNvGrpSpPr/>
-        <p:nvPr/>
-      </p:nvGrpSpPr>
-      <p:grpSpPr/>
-      <p:sp>
-        <p:nvSpPr>
-          <p:cNvPr id="2" name="Заголовок 1"/>
-          <p:cNvSpPr>
-            <a:spLocks noGrp="1"/>
-          </p:cNvSpPr>
-          <p:nvPr>
-            <p:ph type="title"/>
-          </p:nvPr>
-        </p:nvSpPr>
-        <p:spPr/>
-        <p:txBody>
-          <a:bodyPr/>
-          <a:p>
-            <a:pPr algn="ctr"/>
-            <a:r>
-              <a:rPr lang="ru-RU" altLang="en-US"/>
-              <a:t>Приложение </a:t>
-            </a:r>
-            <a:endParaRPr lang="ru-RU" altLang="en-US"/>
-          </a:p>
-        </p:txBody>
-      </p:sp>
-      <p:sp>
-        <p:nvSpPr>
-          <p:cNvPr id="4" name="Замещающий номер слайда 3"/>
-          <p:cNvSpPr>
-            <a:spLocks noGrp="1"/>
-          </p:cNvSpPr>
-          <p:nvPr>
-            <p:ph type="sldNum" sz="quarter" idx="12"/>
-          </p:nvPr>
-        </p:nvSpPr>
-        <p:spPr/>
-        <p:txBody>
-          <a:bodyPr/>
-          <a:p>
-            <a:fld id="{49AE70B2-8BF9-45C0-BB95-33D1B9D3A854}" type="slidenum">
-              <a:rPr lang="en-US" smtClean="0"/>
-            </a:fld>
-            <a:endParaRPr lang="en-US"/>
-          </a:p>
-        </p:txBody>
-      </p:sp>
-      <p:pic>
-        <p:nvPicPr>
-          <p:cNvPr id="7" name="Замещающее содержимое 6"/>
-          <p:cNvPicPr>
-            <a:picLocks noChangeAspect="1"/>
-          </p:cNvPicPr>
-          <p:nvPr>
-            <p:ph idx="1"/>
-          </p:nvPr>
-        </p:nvPicPr>
-        <p:blipFill>
-          <a:blip r:embed="rId1"/>
-          <a:stretch>
-            <a:fillRect/>
-          </a:stretch>
-        </p:blipFill>
-        <p:spPr>
-          <a:xfrm>
-            <a:off x="197485" y="1397000"/>
-            <a:ext cx="11993880" cy="5461000"/>
-          </a:xfrm>
-          <a:prstGeom prst="rect">
-            <a:avLst/>
-          </a:prstGeom>
-        </p:spPr>
-      </p:pic>
-    </p:spTree>
-  </p:cSld>
-  <p:clrMapOvr>
-    <a:masterClrMapping/>
-  </p:clrMapOvr>
-</p:sld>
-</file>
-
-<file path=ppt/slides/slide12.xml><?xml version="1.0" encoding="utf-8"?>
-<p:sld xmlns:a="http://schemas.openxmlformats.org/drawingml/2006/main" xmlns:r="http://schemas.openxmlformats.org/officeDocument/2006/relationships" xmlns:p="http://schemas.openxmlformats.org/presentationml/2006/main">
-  <p:cSld>
-    <p:spTree>
-      <p:nvGrpSpPr>
-        <p:cNvPr id="1" name=""/>
-        <p:cNvGrpSpPr/>
-        <p:nvPr/>
-      </p:nvGrpSpPr>
-      <p:grpSpPr/>
-      <p:sp>
-        <p:nvSpPr>
-          <p:cNvPr id="2" name="Заголовок 1"/>
-          <p:cNvSpPr>
-            <a:spLocks noGrp="1"/>
-          </p:cNvSpPr>
-          <p:nvPr>
-            <p:ph type="title"/>
-          </p:nvPr>
-        </p:nvSpPr>
-        <p:spPr/>
-        <p:txBody>
-          <a:bodyPr/>
-          <a:p>
-            <a:endParaRPr lang="ru-RU" altLang="en-US"/>
-          </a:p>
-        </p:txBody>
-      </p:sp>
-      <p:sp>
-        <p:nvSpPr>
-          <p:cNvPr id="4" name="Замещающий номер слайда 3"/>
-          <p:cNvSpPr>
-            <a:spLocks noGrp="1"/>
-          </p:cNvSpPr>
-          <p:nvPr>
-            <p:ph type="sldNum" sz="quarter" idx="12"/>
-          </p:nvPr>
-        </p:nvSpPr>
-        <p:spPr/>
-        <p:txBody>
-          <a:bodyPr/>
-          <a:p>
-            <a:fld id="{49AE70B2-8BF9-45C0-BB95-33D1B9D3A854}" type="slidenum">
-              <a:rPr lang="en-US" smtClean="0"/>
-            </a:fld>
-            <a:endParaRPr lang="en-US"/>
-          </a:p>
-        </p:txBody>
-      </p:sp>
-      <p:pic>
-        <p:nvPicPr>
-          <p:cNvPr id="7" name="Замещающее содержимое 6"/>
-          <p:cNvPicPr>
-            <a:picLocks noChangeAspect="1"/>
-          </p:cNvPicPr>
-          <p:nvPr>
-            <p:ph idx="1"/>
-          </p:nvPr>
-        </p:nvPicPr>
-        <p:blipFill>
-          <a:blip r:embed="rId1"/>
-          <a:stretch>
-            <a:fillRect/>
-          </a:stretch>
-        </p:blipFill>
-        <p:spPr>
-          <a:xfrm>
-            <a:off x="0" y="0"/>
-            <a:ext cx="12234545" cy="6356350"/>
-          </a:xfrm>
-          <a:prstGeom prst="rect">
-            <a:avLst/>
-          </a:prstGeom>
-        </p:spPr>
-      </p:pic>
-    </p:spTree>
-  </p:cSld>
-  <p:clrMapOvr>
-    <a:masterClrMapping/>
-  </p:clrMapOvr>
-</p:sld>
-</file>
-
-<file path=ppt/slides/slide13.xml><?xml version="1.0" encoding="utf-8"?>
-<p:sld xmlns:a="http://schemas.openxmlformats.org/drawingml/2006/main" xmlns:r="http://schemas.openxmlformats.org/officeDocument/2006/relationships" xmlns:p="http://schemas.openxmlformats.org/presentationml/2006/main">
-  <p:cSld>
-    <p:spTree>
-      <p:nvGrpSpPr>
-        <p:cNvPr id="1" name=""/>
-        <p:cNvGrpSpPr/>
-        <p:nvPr/>
-      </p:nvGrpSpPr>
-      <p:grpSpPr/>
-      <p:sp>
-        <p:nvSpPr>
-          <p:cNvPr id="2" name="Заголовок 1"/>
-          <p:cNvSpPr>
-            <a:spLocks noGrp="1"/>
-          </p:cNvSpPr>
-          <p:nvPr>
-            <p:ph type="title"/>
-          </p:nvPr>
-        </p:nvSpPr>
-        <p:spPr/>
-        <p:txBody>
-          <a:bodyPr/>
-          <a:p>
-            <a:endParaRPr lang="ru-RU" altLang="en-US"/>
-          </a:p>
-        </p:txBody>
-      </p:sp>
-      <p:pic>
-        <p:nvPicPr>
-          <p:cNvPr id="5" name="Замещающее содержимое 4"/>
-          <p:cNvPicPr>
-            <a:picLocks noChangeAspect="1"/>
-          </p:cNvPicPr>
-          <p:nvPr>
-            <p:ph idx="1"/>
-          </p:nvPr>
-        </p:nvPicPr>
-        <p:blipFill>
-          <a:blip r:embed="rId1"/>
-          <a:stretch>
-            <a:fillRect/>
-          </a:stretch>
-        </p:blipFill>
-        <p:spPr>
-          <a:xfrm>
-            <a:off x="0" y="0"/>
-            <a:ext cx="12186920" cy="6236970"/>
-          </a:xfrm>
-          <a:prstGeom prst="rect">
-            <a:avLst/>
-          </a:prstGeom>
-        </p:spPr>
-      </p:pic>
-      <p:sp>
-        <p:nvSpPr>
-          <p:cNvPr id="4" name="Замещающий номер слайда 3"/>
-          <p:cNvSpPr>
-            <a:spLocks noGrp="1"/>
-          </p:cNvSpPr>
-          <p:nvPr>
-            <p:ph type="sldNum" sz="quarter" idx="12"/>
-          </p:nvPr>
-        </p:nvSpPr>
-        <p:spPr/>
-        <p:txBody>
-          <a:bodyPr/>
-          <a:p>
-            <a:fld id="{49AE70B2-8BF9-45C0-BB95-33D1B9D3A854}" type="slidenum">
-              <a:rPr lang="en-US" smtClean="0"/>
-            </a:fld>
-            <a:endParaRPr lang="en-US"/>
-          </a:p>
-        </p:txBody>
-      </p:sp>
-    </p:spTree>
-  </p:cSld>
-  <p:clrMapOvr>
-    <a:masterClrMapping/>
-  </p:clrMapOvr>
 </p:sld>
 </file>
 
